--- a/AI-tools/AI-application-resume-slides/Powerpoint-slides/genspark-ai/genspark-ai.pptx
+++ b/AI-tools/AI-application-resume-slides/Powerpoint-slides/genspark-ai/genspark-ai.pptx
@@ -215,7 +215,7 @@
           <a:p>
             <a:fld id="{7BAEECA8-D063-486F-AE31-5020270C1449}" type="datetimeFigureOut">
               <a:rPr lang="en-US" smtClean="0"/>
-              <a:t>3/17/2026</a:t>
+              <a:t>4/30/2026</a:t>
             </a:fld>
             <a:endParaRPr lang="en-US"/>
           </a:p>
@@ -457,7 +457,7 @@
           <a:p>
             <a:fld id="{6383FAE1-13DE-4511-8C1B-C8AFB720664C}" type="datetimeFigureOut">
               <a:rPr lang="en-US" smtClean="0"/>
-              <a:t>3/17/2026</a:t>
+              <a:t>4/30/2026</a:t>
             </a:fld>
             <a:endParaRPr lang="en-US"/>
           </a:p>
@@ -655,7 +655,7 @@
           <a:p>
             <a:fld id="{6383FAE1-13DE-4511-8C1B-C8AFB720664C}" type="datetimeFigureOut">
               <a:rPr lang="en-US" smtClean="0"/>
-              <a:t>3/17/2026</a:t>
+              <a:t>4/30/2026</a:t>
             </a:fld>
             <a:endParaRPr lang="en-US"/>
           </a:p>
@@ -863,7 +863,7 @@
           <a:p>
             <a:fld id="{6383FAE1-13DE-4511-8C1B-C8AFB720664C}" type="datetimeFigureOut">
               <a:rPr lang="en-US" smtClean="0"/>
-              <a:t>3/17/2026</a:t>
+              <a:t>4/30/2026</a:t>
             </a:fld>
             <a:endParaRPr lang="en-US"/>
           </a:p>
@@ -1061,7 +1061,7 @@
           <a:p>
             <a:fld id="{6383FAE1-13DE-4511-8C1B-C8AFB720664C}" type="datetimeFigureOut">
               <a:rPr lang="en-US" smtClean="0"/>
-              <a:t>3/17/2026</a:t>
+              <a:t>4/30/2026</a:t>
             </a:fld>
             <a:endParaRPr lang="en-US"/>
           </a:p>
@@ -1336,7 +1336,7 @@
           <a:p>
             <a:fld id="{6383FAE1-13DE-4511-8C1B-C8AFB720664C}" type="datetimeFigureOut">
               <a:rPr lang="en-US" smtClean="0"/>
-              <a:t>3/17/2026</a:t>
+              <a:t>4/30/2026</a:t>
             </a:fld>
             <a:endParaRPr lang="en-US"/>
           </a:p>
@@ -1601,7 +1601,7 @@
           <a:p>
             <a:fld id="{6383FAE1-13DE-4511-8C1B-C8AFB720664C}" type="datetimeFigureOut">
               <a:rPr lang="en-US" smtClean="0"/>
-              <a:t>3/17/2026</a:t>
+              <a:t>4/30/2026</a:t>
             </a:fld>
             <a:endParaRPr lang="en-US"/>
           </a:p>
@@ -2013,7 +2013,7 @@
           <a:p>
             <a:fld id="{6383FAE1-13DE-4511-8C1B-C8AFB720664C}" type="datetimeFigureOut">
               <a:rPr lang="en-US" smtClean="0"/>
-              <a:t>3/17/2026</a:t>
+              <a:t>4/30/2026</a:t>
             </a:fld>
             <a:endParaRPr lang="en-US"/>
           </a:p>
@@ -2154,7 +2154,7 @@
           <a:p>
             <a:fld id="{6383FAE1-13DE-4511-8C1B-C8AFB720664C}" type="datetimeFigureOut">
               <a:rPr lang="en-US" smtClean="0"/>
-              <a:t>3/17/2026</a:t>
+              <a:t>4/30/2026</a:t>
             </a:fld>
             <a:endParaRPr lang="en-US"/>
           </a:p>
@@ -2267,7 +2267,7 @@
           <a:p>
             <a:fld id="{6383FAE1-13DE-4511-8C1B-C8AFB720664C}" type="datetimeFigureOut">
               <a:rPr lang="en-US" smtClean="0"/>
-              <a:t>3/17/2026</a:t>
+              <a:t>4/30/2026</a:t>
             </a:fld>
             <a:endParaRPr lang="en-US"/>
           </a:p>
@@ -2578,7 +2578,7 @@
           <a:p>
             <a:fld id="{6383FAE1-13DE-4511-8C1B-C8AFB720664C}" type="datetimeFigureOut">
               <a:rPr lang="en-US" smtClean="0"/>
-              <a:t>3/17/2026</a:t>
+              <a:t>4/30/2026</a:t>
             </a:fld>
             <a:endParaRPr lang="en-US"/>
           </a:p>
@@ -2869,7 +2869,7 @@
           <a:p>
             <a:fld id="{6383FAE1-13DE-4511-8C1B-C8AFB720664C}" type="datetimeFigureOut">
               <a:rPr lang="en-US" smtClean="0"/>
-              <a:t>3/17/2026</a:t>
+              <a:t>4/30/2026</a:t>
             </a:fld>
             <a:endParaRPr lang="en-US"/>
           </a:p>
@@ -3113,7 +3113,7 @@
           <a:p>
             <a:fld id="{6383FAE1-13DE-4511-8C1B-C8AFB720664C}" type="datetimeFigureOut">
               <a:rPr lang="en-US" smtClean="0"/>
-              <a:t>3/17/2026</a:t>
+              <a:t>4/30/2026</a:t>
             </a:fld>
             <a:endParaRPr lang="en-US"/>
           </a:p>
@@ -3744,8 +3744,8 @@
         </p:blipFill>
         <p:spPr>
           <a:xfrm>
-            <a:off x="442123" y="1617818"/>
-            <a:ext cx="11307753" cy="4134427"/>
+            <a:off x="118839" y="1371600"/>
+            <a:ext cx="12056192" cy="4408077"/>
           </a:xfrm>
           <a:prstGeom prst="rect">
             <a:avLst/>
@@ -3860,7 +3860,7 @@
         </p:blipFill>
         <p:spPr>
           <a:xfrm>
-            <a:off x="3611874" y="1382607"/>
+            <a:off x="2935218" y="2031831"/>
             <a:ext cx="8278380" cy="3324689"/>
           </a:xfrm>
           <a:prstGeom prst="rect">
@@ -3918,7 +3918,7 @@
         </p:nvSpPr>
         <p:spPr>
           <a:xfrm>
-            <a:off x="210312" y="456522"/>
+            <a:off x="8430768" y="1188042"/>
             <a:ext cx="3913632" cy="1200329"/>
           </a:xfrm>
           <a:prstGeom prst="rect">
@@ -3994,7 +3994,7 @@
         </p:blipFill>
         <p:spPr>
           <a:xfrm>
-            <a:off x="4653306" y="132588"/>
+            <a:off x="154103" y="212099"/>
             <a:ext cx="7214260" cy="6135624"/>
           </a:xfrm>
           <a:prstGeom prst="rect">
